--- a/UmaTeachingMaterial/JavaScript/JavaScript_uma_self.pptx
+++ b/UmaTeachingMaterial/JavaScript/JavaScript_uma_self.pptx
@@ -13964,6 +13964,1158 @@
           <a:chExt cx="0" cy="0"/>
         </a:xfrm>
       </p:grpSpPr>
+      <p:sp>
+        <p:nvSpPr>
+          <p:cNvPr id="3" name="TextBox 2">
+            <a:extLst>
+              <a:ext uri="{FF2B5EF4-FFF2-40B4-BE49-F238E27FC236}">
+                <a16:creationId xmlns:a16="http://schemas.microsoft.com/office/drawing/2014/main" id="{0A2B9130-7137-5891-EC90-22823C3FB50E}"/>
+              </a:ext>
+            </a:extLst>
+          </p:cNvPr>
+          <p:cNvSpPr txBox="1"/>
+          <p:nvPr/>
+        </p:nvSpPr>
+        <p:spPr>
+          <a:xfrm>
+            <a:off x="129654" y="0"/>
+            <a:ext cx="9776346" cy="646331"/>
+          </a:xfrm>
+          <a:prstGeom prst="rect">
+            <a:avLst/>
+          </a:prstGeom>
+          <a:noFill/>
+        </p:spPr>
+        <p:txBody>
+          <a:bodyPr wrap="square">
+            <a:spAutoFit/>
+          </a:bodyPr>
+          <a:lstStyle/>
+          <a:p>
+            <a:r>
+              <a:rPr lang="en-US" b="0" i="0" dirty="0">
+                <a:solidFill>
+                  <a:srgbClr val="313130"/>
+                </a:solidFill>
+                <a:effectLst/>
+                <a:latin typeface="BlinkMacSystemFont"/>
+              </a:rPr>
+              <a:t>there are eight data types in JavaScript. Seven of them are called “primitive”, because their values contain only a single thing (be it a string or a number or whatever).</a:t>
+            </a:r>
+            <a:endParaRPr lang="en-US" dirty="0"/>
+          </a:p>
+        </p:txBody>
+      </p:sp>
+      <p:sp>
+        <p:nvSpPr>
+          <p:cNvPr id="5" name="TextBox 4">
+            <a:extLst>
+              <a:ext uri="{FF2B5EF4-FFF2-40B4-BE49-F238E27FC236}">
+                <a16:creationId xmlns:a16="http://schemas.microsoft.com/office/drawing/2014/main" id="{68EB54B4-CFD4-D7D2-22E0-E20767571BDB}"/>
+              </a:ext>
+            </a:extLst>
+          </p:cNvPr>
+          <p:cNvSpPr txBox="1"/>
+          <p:nvPr/>
+        </p:nvSpPr>
+        <p:spPr>
+          <a:xfrm>
+            <a:off x="129653" y="646331"/>
+            <a:ext cx="9273653" cy="646331"/>
+          </a:xfrm>
+          <a:prstGeom prst="rect">
+            <a:avLst/>
+          </a:prstGeom>
+          <a:noFill/>
+        </p:spPr>
+        <p:txBody>
+          <a:bodyPr wrap="square">
+            <a:spAutoFit/>
+          </a:bodyPr>
+          <a:lstStyle/>
+          <a:p>
+            <a:r>
+              <a:rPr lang="en-US" b="0" i="0" dirty="0">
+                <a:solidFill>
+                  <a:srgbClr val="0077AA"/>
+                </a:solidFill>
+                <a:effectLst/>
+                <a:latin typeface="Consolas" panose="020B0609020204030204" pitchFamily="49" charset="0"/>
+              </a:rPr>
+              <a:t>let</a:t>
+            </a:r>
+            <a:r>
+              <a:rPr lang="en-US" b="0" i="0" dirty="0">
+                <a:solidFill>
+                  <a:srgbClr val="313130"/>
+                </a:solidFill>
+                <a:effectLst/>
+                <a:latin typeface="Consolas" panose="020B0609020204030204" pitchFamily="49" charset="0"/>
+              </a:rPr>
+              <a:t> user </a:t>
+            </a:r>
+            <a:r>
+              <a:rPr lang="en-US" b="0" i="0" dirty="0">
+                <a:solidFill>
+                  <a:srgbClr val="A67F59"/>
+                </a:solidFill>
+                <a:effectLst/>
+                <a:latin typeface="Consolas" panose="020B0609020204030204" pitchFamily="49" charset="0"/>
+              </a:rPr>
+              <a:t>=</a:t>
+            </a:r>
+            <a:r>
+              <a:rPr lang="en-US" b="0" i="0" dirty="0">
+                <a:solidFill>
+                  <a:srgbClr val="313130"/>
+                </a:solidFill>
+                <a:effectLst/>
+                <a:latin typeface="Consolas" panose="020B0609020204030204" pitchFamily="49" charset="0"/>
+              </a:rPr>
+              <a:t> </a:t>
+            </a:r>
+            <a:r>
+              <a:rPr lang="en-US" b="0" i="0" dirty="0">
+                <a:solidFill>
+                  <a:srgbClr val="0077AA"/>
+                </a:solidFill>
+                <a:effectLst/>
+                <a:latin typeface="Consolas" panose="020B0609020204030204" pitchFamily="49" charset="0"/>
+              </a:rPr>
+              <a:t>new</a:t>
+            </a:r>
+            <a:r>
+              <a:rPr lang="en-US" b="0" i="0" dirty="0">
+                <a:solidFill>
+                  <a:srgbClr val="313130"/>
+                </a:solidFill>
+                <a:effectLst/>
+                <a:latin typeface="Consolas" panose="020B0609020204030204" pitchFamily="49" charset="0"/>
+              </a:rPr>
+              <a:t> </a:t>
+            </a:r>
+            <a:r>
+              <a:rPr lang="en-US" b="0" i="0" dirty="0">
+                <a:solidFill>
+                  <a:srgbClr val="DD4A68"/>
+                </a:solidFill>
+                <a:effectLst/>
+                <a:latin typeface="Consolas" panose="020B0609020204030204" pitchFamily="49" charset="0"/>
+              </a:rPr>
+              <a:t>Object</a:t>
+            </a:r>
+            <a:r>
+              <a:rPr lang="en-US" b="0" i="0" dirty="0">
+                <a:solidFill>
+                  <a:srgbClr val="708090"/>
+                </a:solidFill>
+                <a:effectLst/>
+                <a:latin typeface="Consolas" panose="020B0609020204030204" pitchFamily="49" charset="0"/>
+              </a:rPr>
+              <a:t>();</a:t>
+            </a:r>
+            <a:r>
+              <a:rPr lang="en-US" b="0" i="0" dirty="0">
+                <a:solidFill>
+                  <a:srgbClr val="313130"/>
+                </a:solidFill>
+                <a:effectLst/>
+                <a:latin typeface="Consolas" panose="020B0609020204030204" pitchFamily="49" charset="0"/>
+              </a:rPr>
+              <a:t> </a:t>
+            </a:r>
+            <a:r>
+              <a:rPr lang="en-US" b="0" i="0" dirty="0">
+                <a:solidFill>
+                  <a:srgbClr val="708090"/>
+                </a:solidFill>
+                <a:effectLst/>
+                <a:latin typeface="Consolas" panose="020B0609020204030204" pitchFamily="49" charset="0"/>
+              </a:rPr>
+              <a:t>// "object constructor" syntax</a:t>
+            </a:r>
+            <a:r>
+              <a:rPr lang="en-US" b="0" i="0" dirty="0">
+                <a:solidFill>
+                  <a:srgbClr val="313130"/>
+                </a:solidFill>
+                <a:effectLst/>
+                <a:latin typeface="Consolas" panose="020B0609020204030204" pitchFamily="49" charset="0"/>
+              </a:rPr>
+              <a:t> </a:t>
+            </a:r>
+          </a:p>
+          <a:p>
+            <a:r>
+              <a:rPr lang="en-US" b="0" i="0" dirty="0">
+                <a:solidFill>
+                  <a:srgbClr val="0077AA"/>
+                </a:solidFill>
+                <a:effectLst/>
+                <a:latin typeface="Consolas" panose="020B0609020204030204" pitchFamily="49" charset="0"/>
+              </a:rPr>
+              <a:t>let</a:t>
+            </a:r>
+            <a:r>
+              <a:rPr lang="en-US" b="0" i="0" dirty="0">
+                <a:solidFill>
+                  <a:srgbClr val="313130"/>
+                </a:solidFill>
+                <a:effectLst/>
+                <a:latin typeface="Consolas" panose="020B0609020204030204" pitchFamily="49" charset="0"/>
+              </a:rPr>
+              <a:t> user </a:t>
+            </a:r>
+            <a:r>
+              <a:rPr lang="en-US" b="0" i="0" dirty="0">
+                <a:solidFill>
+                  <a:srgbClr val="A67F59"/>
+                </a:solidFill>
+                <a:effectLst/>
+                <a:latin typeface="Consolas" panose="020B0609020204030204" pitchFamily="49" charset="0"/>
+              </a:rPr>
+              <a:t>=</a:t>
+            </a:r>
+            <a:r>
+              <a:rPr lang="en-US" b="0" i="0" dirty="0">
+                <a:solidFill>
+                  <a:srgbClr val="313130"/>
+                </a:solidFill>
+                <a:effectLst/>
+                <a:latin typeface="Consolas" panose="020B0609020204030204" pitchFamily="49" charset="0"/>
+              </a:rPr>
+              <a:t> </a:t>
+            </a:r>
+            <a:r>
+              <a:rPr lang="en-US" b="0" i="0" dirty="0">
+                <a:solidFill>
+                  <a:srgbClr val="708090"/>
+                </a:solidFill>
+                <a:effectLst/>
+                <a:latin typeface="Consolas" panose="020B0609020204030204" pitchFamily="49" charset="0"/>
+              </a:rPr>
+              <a:t>{};</a:t>
+            </a:r>
+            <a:r>
+              <a:rPr lang="en-US" b="0" i="0" dirty="0">
+                <a:solidFill>
+                  <a:srgbClr val="313130"/>
+                </a:solidFill>
+                <a:effectLst/>
+                <a:latin typeface="Consolas" panose="020B0609020204030204" pitchFamily="49" charset="0"/>
+              </a:rPr>
+              <a:t> </a:t>
+            </a:r>
+            <a:r>
+              <a:rPr lang="en-US" b="0" i="0" dirty="0">
+                <a:solidFill>
+                  <a:srgbClr val="708090"/>
+                </a:solidFill>
+                <a:effectLst/>
+                <a:latin typeface="Consolas" panose="020B0609020204030204" pitchFamily="49" charset="0"/>
+              </a:rPr>
+              <a:t>// "object literal" syntax</a:t>
+            </a:r>
+            <a:endParaRPr lang="en-US" dirty="0"/>
+          </a:p>
+        </p:txBody>
+      </p:sp>
+      <p:sp>
+        <p:nvSpPr>
+          <p:cNvPr id="7" name="TextBox 6">
+            <a:extLst>
+              <a:ext uri="{FF2B5EF4-FFF2-40B4-BE49-F238E27FC236}">
+                <a16:creationId xmlns:a16="http://schemas.microsoft.com/office/drawing/2014/main" id="{B2F0516B-88DF-DA7C-6667-740F2C0D3358}"/>
+              </a:ext>
+            </a:extLst>
+          </p:cNvPr>
+          <p:cNvSpPr txBox="1"/>
+          <p:nvPr/>
+        </p:nvSpPr>
+        <p:spPr>
+          <a:xfrm>
+            <a:off x="129653" y="1338828"/>
+            <a:ext cx="9546610" cy="1200329"/>
+          </a:xfrm>
+          <a:prstGeom prst="rect">
+            <a:avLst/>
+          </a:prstGeom>
+          <a:noFill/>
+        </p:spPr>
+        <p:txBody>
+          <a:bodyPr wrap="square">
+            <a:spAutoFit/>
+          </a:bodyPr>
+          <a:lstStyle/>
+          <a:p>
+            <a:r>
+              <a:rPr lang="en-US" b="0" i="0" dirty="0">
+                <a:solidFill>
+                  <a:srgbClr val="0077AA"/>
+                </a:solidFill>
+                <a:effectLst/>
+                <a:latin typeface="Consolas" panose="020B0609020204030204" pitchFamily="49" charset="0"/>
+              </a:rPr>
+              <a:t>let</a:t>
+            </a:r>
+            <a:r>
+              <a:rPr lang="en-US" b="0" i="0" dirty="0">
+                <a:solidFill>
+                  <a:srgbClr val="313130"/>
+                </a:solidFill>
+                <a:effectLst/>
+                <a:latin typeface="Consolas" panose="020B0609020204030204" pitchFamily="49" charset="0"/>
+              </a:rPr>
+              <a:t> user </a:t>
+            </a:r>
+            <a:r>
+              <a:rPr lang="en-US" b="0" i="0" dirty="0">
+                <a:solidFill>
+                  <a:srgbClr val="A67F59"/>
+                </a:solidFill>
+                <a:effectLst/>
+                <a:latin typeface="Consolas" panose="020B0609020204030204" pitchFamily="49" charset="0"/>
+              </a:rPr>
+              <a:t>=</a:t>
+            </a:r>
+            <a:r>
+              <a:rPr lang="en-US" b="0" i="0" dirty="0">
+                <a:solidFill>
+                  <a:srgbClr val="313130"/>
+                </a:solidFill>
+                <a:effectLst/>
+                <a:latin typeface="Consolas" panose="020B0609020204030204" pitchFamily="49" charset="0"/>
+              </a:rPr>
+              <a:t> </a:t>
+            </a:r>
+            <a:r>
+              <a:rPr lang="en-US" b="0" i="0" dirty="0">
+                <a:solidFill>
+                  <a:srgbClr val="708090"/>
+                </a:solidFill>
+                <a:effectLst/>
+                <a:latin typeface="Consolas" panose="020B0609020204030204" pitchFamily="49" charset="0"/>
+              </a:rPr>
+              <a:t>{</a:t>
+            </a:r>
+            <a:r>
+              <a:rPr lang="en-US" b="0" i="0" dirty="0">
+                <a:solidFill>
+                  <a:srgbClr val="313130"/>
+                </a:solidFill>
+                <a:effectLst/>
+                <a:latin typeface="Consolas" panose="020B0609020204030204" pitchFamily="49" charset="0"/>
+              </a:rPr>
+              <a:t> </a:t>
+            </a:r>
+            <a:r>
+              <a:rPr lang="en-US" b="0" i="0" dirty="0">
+                <a:solidFill>
+                  <a:srgbClr val="708090"/>
+                </a:solidFill>
+                <a:effectLst/>
+                <a:latin typeface="Consolas" panose="020B0609020204030204" pitchFamily="49" charset="0"/>
+              </a:rPr>
+              <a:t>// an object</a:t>
+            </a:r>
+            <a:r>
+              <a:rPr lang="en-US" b="0" i="0" dirty="0">
+                <a:solidFill>
+                  <a:srgbClr val="313130"/>
+                </a:solidFill>
+                <a:effectLst/>
+                <a:latin typeface="Consolas" panose="020B0609020204030204" pitchFamily="49" charset="0"/>
+              </a:rPr>
+              <a:t> </a:t>
+            </a:r>
+          </a:p>
+          <a:p>
+            <a:r>
+              <a:rPr lang="en-US" dirty="0">
+                <a:solidFill>
+                  <a:srgbClr val="313130"/>
+                </a:solidFill>
+                <a:latin typeface="Consolas" panose="020B0609020204030204" pitchFamily="49" charset="0"/>
+              </a:rPr>
+              <a:t>	</a:t>
+            </a:r>
+            <a:r>
+              <a:rPr lang="en-US" b="0" i="0" dirty="0">
+                <a:solidFill>
+                  <a:srgbClr val="313130"/>
+                </a:solidFill>
+                <a:effectLst/>
+                <a:latin typeface="Consolas" panose="020B0609020204030204" pitchFamily="49" charset="0"/>
+              </a:rPr>
+              <a:t>name</a:t>
+            </a:r>
+            <a:r>
+              <a:rPr lang="en-US" b="0" i="0" dirty="0">
+                <a:solidFill>
+                  <a:srgbClr val="A67F59"/>
+                </a:solidFill>
+                <a:effectLst/>
+                <a:latin typeface="Consolas" panose="020B0609020204030204" pitchFamily="49" charset="0"/>
+              </a:rPr>
+              <a:t>:</a:t>
+            </a:r>
+            <a:r>
+              <a:rPr lang="en-US" b="0" i="0" dirty="0">
+                <a:solidFill>
+                  <a:srgbClr val="313130"/>
+                </a:solidFill>
+                <a:effectLst/>
+                <a:latin typeface="Consolas" panose="020B0609020204030204" pitchFamily="49" charset="0"/>
+              </a:rPr>
+              <a:t> </a:t>
+            </a:r>
+            <a:r>
+              <a:rPr lang="en-US" b="0" i="0" dirty="0">
+                <a:solidFill>
+                  <a:srgbClr val="669900"/>
+                </a:solidFill>
+                <a:effectLst/>
+                <a:latin typeface="Consolas" panose="020B0609020204030204" pitchFamily="49" charset="0"/>
+              </a:rPr>
+              <a:t>"John"</a:t>
+            </a:r>
+            <a:r>
+              <a:rPr lang="en-US" b="0" i="0" dirty="0">
+                <a:solidFill>
+                  <a:srgbClr val="708090"/>
+                </a:solidFill>
+                <a:effectLst/>
+                <a:latin typeface="Consolas" panose="020B0609020204030204" pitchFamily="49" charset="0"/>
+              </a:rPr>
+              <a:t>,</a:t>
+            </a:r>
+            <a:r>
+              <a:rPr lang="en-US" b="0" i="0" dirty="0">
+                <a:solidFill>
+                  <a:srgbClr val="313130"/>
+                </a:solidFill>
+                <a:effectLst/>
+                <a:latin typeface="Consolas" panose="020B0609020204030204" pitchFamily="49" charset="0"/>
+              </a:rPr>
+              <a:t> </a:t>
+            </a:r>
+            <a:r>
+              <a:rPr lang="en-US" b="0" i="0" dirty="0">
+                <a:solidFill>
+                  <a:srgbClr val="708090"/>
+                </a:solidFill>
+                <a:effectLst/>
+                <a:latin typeface="Consolas" panose="020B0609020204030204" pitchFamily="49" charset="0"/>
+              </a:rPr>
+              <a:t>// by key "name" store value "John"</a:t>
+            </a:r>
+            <a:r>
+              <a:rPr lang="en-US" b="0" i="0" dirty="0">
+                <a:solidFill>
+                  <a:srgbClr val="313130"/>
+                </a:solidFill>
+                <a:effectLst/>
+                <a:latin typeface="Consolas" panose="020B0609020204030204" pitchFamily="49" charset="0"/>
+              </a:rPr>
+              <a:t> </a:t>
+            </a:r>
+          </a:p>
+          <a:p>
+            <a:r>
+              <a:rPr lang="en-US" dirty="0">
+                <a:solidFill>
+                  <a:srgbClr val="313130"/>
+                </a:solidFill>
+                <a:latin typeface="Consolas" panose="020B0609020204030204" pitchFamily="49" charset="0"/>
+              </a:rPr>
+              <a:t>	</a:t>
+            </a:r>
+            <a:r>
+              <a:rPr lang="en-US" b="0" i="0" dirty="0">
+                <a:solidFill>
+                  <a:srgbClr val="313130"/>
+                </a:solidFill>
+                <a:effectLst/>
+                <a:latin typeface="Consolas" panose="020B0609020204030204" pitchFamily="49" charset="0"/>
+              </a:rPr>
+              <a:t>age</a:t>
+            </a:r>
+            <a:r>
+              <a:rPr lang="en-US" b="0" i="0" dirty="0">
+                <a:solidFill>
+                  <a:srgbClr val="A67F59"/>
+                </a:solidFill>
+                <a:effectLst/>
+                <a:latin typeface="Consolas" panose="020B0609020204030204" pitchFamily="49" charset="0"/>
+              </a:rPr>
+              <a:t>:</a:t>
+            </a:r>
+            <a:r>
+              <a:rPr lang="en-US" b="0" i="0" dirty="0">
+                <a:solidFill>
+                  <a:srgbClr val="313130"/>
+                </a:solidFill>
+                <a:effectLst/>
+                <a:latin typeface="Consolas" panose="020B0609020204030204" pitchFamily="49" charset="0"/>
+              </a:rPr>
+              <a:t> </a:t>
+            </a:r>
+            <a:r>
+              <a:rPr lang="en-US" b="0" i="0" dirty="0">
+                <a:solidFill>
+                  <a:srgbClr val="990055"/>
+                </a:solidFill>
+                <a:effectLst/>
+                <a:latin typeface="Consolas" panose="020B0609020204030204" pitchFamily="49" charset="0"/>
+              </a:rPr>
+              <a:t>30</a:t>
+            </a:r>
+            <a:r>
+              <a:rPr lang="en-US" b="0" i="0" dirty="0">
+                <a:solidFill>
+                  <a:srgbClr val="313130"/>
+                </a:solidFill>
+                <a:effectLst/>
+                <a:latin typeface="Consolas" panose="020B0609020204030204" pitchFamily="49" charset="0"/>
+              </a:rPr>
+              <a:t> </a:t>
+            </a:r>
+            <a:r>
+              <a:rPr lang="en-US" b="0" i="0" dirty="0">
+                <a:solidFill>
+                  <a:srgbClr val="708090"/>
+                </a:solidFill>
+                <a:effectLst/>
+                <a:latin typeface="Consolas" panose="020B0609020204030204" pitchFamily="49" charset="0"/>
+              </a:rPr>
+              <a:t>// by key "age" store value 30</a:t>
+            </a:r>
+            <a:r>
+              <a:rPr lang="en-US" b="0" i="0" dirty="0">
+                <a:solidFill>
+                  <a:srgbClr val="313130"/>
+                </a:solidFill>
+                <a:effectLst/>
+                <a:latin typeface="Consolas" panose="020B0609020204030204" pitchFamily="49" charset="0"/>
+              </a:rPr>
+              <a:t> </a:t>
+            </a:r>
+          </a:p>
+          <a:p>
+            <a:r>
+              <a:rPr lang="en-US" b="0" i="0" dirty="0">
+                <a:solidFill>
+                  <a:srgbClr val="708090"/>
+                </a:solidFill>
+                <a:effectLst/>
+                <a:latin typeface="Consolas" panose="020B0609020204030204" pitchFamily="49" charset="0"/>
+              </a:rPr>
+              <a:t>};</a:t>
+            </a:r>
+            <a:endParaRPr lang="en-US" dirty="0"/>
+          </a:p>
+        </p:txBody>
+      </p:sp>
+      <p:sp>
+        <p:nvSpPr>
+          <p:cNvPr id="9" name="TextBox 8">
+            <a:extLst>
+              <a:ext uri="{FF2B5EF4-FFF2-40B4-BE49-F238E27FC236}">
+                <a16:creationId xmlns:a16="http://schemas.microsoft.com/office/drawing/2014/main" id="{623DC476-B170-2D0F-7D9A-89AECB6030A4}"/>
+              </a:ext>
+            </a:extLst>
+          </p:cNvPr>
+          <p:cNvSpPr txBox="1"/>
+          <p:nvPr/>
+        </p:nvSpPr>
+        <p:spPr>
+          <a:xfrm>
+            <a:off x="129653" y="2539157"/>
+            <a:ext cx="4974610" cy="923330"/>
+          </a:xfrm>
+          <a:prstGeom prst="rect">
+            <a:avLst/>
+          </a:prstGeom>
+          <a:noFill/>
+        </p:spPr>
+        <p:txBody>
+          <a:bodyPr wrap="square">
+            <a:spAutoFit/>
+          </a:bodyPr>
+          <a:lstStyle/>
+          <a:p>
+            <a:r>
+              <a:rPr lang="en-US" b="0" i="0" dirty="0">
+                <a:solidFill>
+                  <a:srgbClr val="708090"/>
+                </a:solidFill>
+                <a:effectLst/>
+                <a:latin typeface="Consolas" panose="020B0609020204030204" pitchFamily="49" charset="0"/>
+              </a:rPr>
+              <a:t>// get property values of the object:</a:t>
+            </a:r>
+            <a:r>
+              <a:rPr lang="en-US" b="0" i="0" dirty="0">
+                <a:solidFill>
+                  <a:srgbClr val="313130"/>
+                </a:solidFill>
+                <a:effectLst/>
+                <a:latin typeface="Consolas" panose="020B0609020204030204" pitchFamily="49" charset="0"/>
+              </a:rPr>
+              <a:t> </a:t>
+            </a:r>
+          </a:p>
+          <a:p>
+            <a:r>
+              <a:rPr lang="en-US" b="0" i="0" dirty="0">
+                <a:solidFill>
+                  <a:srgbClr val="DD4A68"/>
+                </a:solidFill>
+                <a:effectLst/>
+                <a:latin typeface="Consolas" panose="020B0609020204030204" pitchFamily="49" charset="0"/>
+              </a:rPr>
+              <a:t>alert</a:t>
+            </a:r>
+            <a:r>
+              <a:rPr lang="en-US" b="0" i="0" dirty="0">
+                <a:solidFill>
+                  <a:srgbClr val="708090"/>
+                </a:solidFill>
+                <a:effectLst/>
+                <a:latin typeface="Consolas" panose="020B0609020204030204" pitchFamily="49" charset="0"/>
+              </a:rPr>
+              <a:t>(</a:t>
+            </a:r>
+            <a:r>
+              <a:rPr lang="en-US" b="0" i="0" dirty="0">
+                <a:solidFill>
+                  <a:srgbClr val="313130"/>
+                </a:solidFill>
+                <a:effectLst/>
+                <a:latin typeface="Consolas" panose="020B0609020204030204" pitchFamily="49" charset="0"/>
+              </a:rPr>
+              <a:t> user</a:t>
+            </a:r>
+            <a:r>
+              <a:rPr lang="en-US" b="0" i="0" dirty="0">
+                <a:solidFill>
+                  <a:srgbClr val="708090"/>
+                </a:solidFill>
+                <a:effectLst/>
+                <a:latin typeface="Consolas" panose="020B0609020204030204" pitchFamily="49" charset="0"/>
+              </a:rPr>
+              <a:t>.</a:t>
+            </a:r>
+            <a:r>
+              <a:rPr lang="en-US" b="0" i="0" dirty="0">
+                <a:solidFill>
+                  <a:srgbClr val="313130"/>
+                </a:solidFill>
+                <a:effectLst/>
+                <a:latin typeface="Consolas" panose="020B0609020204030204" pitchFamily="49" charset="0"/>
+              </a:rPr>
+              <a:t>name </a:t>
+            </a:r>
+            <a:r>
+              <a:rPr lang="en-US" b="0" i="0" dirty="0">
+                <a:solidFill>
+                  <a:srgbClr val="708090"/>
+                </a:solidFill>
+                <a:effectLst/>
+                <a:latin typeface="Consolas" panose="020B0609020204030204" pitchFamily="49" charset="0"/>
+              </a:rPr>
+              <a:t>);</a:t>
+            </a:r>
+            <a:r>
+              <a:rPr lang="en-US" b="0" i="0" dirty="0">
+                <a:solidFill>
+                  <a:srgbClr val="313130"/>
+                </a:solidFill>
+                <a:effectLst/>
+                <a:latin typeface="Consolas" panose="020B0609020204030204" pitchFamily="49" charset="0"/>
+              </a:rPr>
+              <a:t> </a:t>
+            </a:r>
+            <a:r>
+              <a:rPr lang="en-US" b="0" i="0" dirty="0">
+                <a:solidFill>
+                  <a:srgbClr val="708090"/>
+                </a:solidFill>
+                <a:effectLst/>
+                <a:latin typeface="Consolas" panose="020B0609020204030204" pitchFamily="49" charset="0"/>
+              </a:rPr>
+              <a:t>// John</a:t>
+            </a:r>
+            <a:r>
+              <a:rPr lang="en-US" b="0" i="0" dirty="0">
+                <a:solidFill>
+                  <a:srgbClr val="313130"/>
+                </a:solidFill>
+                <a:effectLst/>
+                <a:latin typeface="Consolas" panose="020B0609020204030204" pitchFamily="49" charset="0"/>
+              </a:rPr>
+              <a:t> </a:t>
+            </a:r>
+          </a:p>
+          <a:p>
+            <a:r>
+              <a:rPr lang="en-US" b="0" i="0" dirty="0">
+                <a:solidFill>
+                  <a:srgbClr val="DD4A68"/>
+                </a:solidFill>
+                <a:effectLst/>
+                <a:latin typeface="Consolas" panose="020B0609020204030204" pitchFamily="49" charset="0"/>
+              </a:rPr>
+              <a:t>alert</a:t>
+            </a:r>
+            <a:r>
+              <a:rPr lang="en-US" b="0" i="0" dirty="0">
+                <a:solidFill>
+                  <a:srgbClr val="708090"/>
+                </a:solidFill>
+                <a:effectLst/>
+                <a:latin typeface="Consolas" panose="020B0609020204030204" pitchFamily="49" charset="0"/>
+              </a:rPr>
+              <a:t>(</a:t>
+            </a:r>
+            <a:r>
+              <a:rPr lang="en-US" b="0" i="0" dirty="0">
+                <a:solidFill>
+                  <a:srgbClr val="313130"/>
+                </a:solidFill>
+                <a:effectLst/>
+                <a:latin typeface="Consolas" panose="020B0609020204030204" pitchFamily="49" charset="0"/>
+              </a:rPr>
+              <a:t> </a:t>
+            </a:r>
+            <a:r>
+              <a:rPr lang="en-US" b="0" i="0" dirty="0" err="1">
+                <a:solidFill>
+                  <a:srgbClr val="313130"/>
+                </a:solidFill>
+                <a:effectLst/>
+                <a:latin typeface="Consolas" panose="020B0609020204030204" pitchFamily="49" charset="0"/>
+              </a:rPr>
+              <a:t>user</a:t>
+            </a:r>
+            <a:r>
+              <a:rPr lang="en-US" b="0" i="0" dirty="0" err="1">
+                <a:solidFill>
+                  <a:srgbClr val="708090"/>
+                </a:solidFill>
+                <a:effectLst/>
+                <a:latin typeface="Consolas" panose="020B0609020204030204" pitchFamily="49" charset="0"/>
+              </a:rPr>
+              <a:t>.</a:t>
+            </a:r>
+            <a:r>
+              <a:rPr lang="en-US" b="0" i="0" dirty="0" err="1">
+                <a:solidFill>
+                  <a:srgbClr val="313130"/>
+                </a:solidFill>
+                <a:effectLst/>
+                <a:latin typeface="Consolas" panose="020B0609020204030204" pitchFamily="49" charset="0"/>
+              </a:rPr>
+              <a:t>age</a:t>
+            </a:r>
+            <a:r>
+              <a:rPr lang="en-US" b="0" i="0" dirty="0">
+                <a:solidFill>
+                  <a:srgbClr val="313130"/>
+                </a:solidFill>
+                <a:effectLst/>
+                <a:latin typeface="Consolas" panose="020B0609020204030204" pitchFamily="49" charset="0"/>
+              </a:rPr>
+              <a:t> </a:t>
+            </a:r>
+            <a:r>
+              <a:rPr lang="en-US" b="0" i="0" dirty="0">
+                <a:solidFill>
+                  <a:srgbClr val="708090"/>
+                </a:solidFill>
+                <a:effectLst/>
+                <a:latin typeface="Consolas" panose="020B0609020204030204" pitchFamily="49" charset="0"/>
+              </a:rPr>
+              <a:t>);</a:t>
+            </a:r>
+            <a:r>
+              <a:rPr lang="en-US" b="0" i="0" dirty="0">
+                <a:solidFill>
+                  <a:srgbClr val="313130"/>
+                </a:solidFill>
+                <a:effectLst/>
+                <a:latin typeface="Consolas" panose="020B0609020204030204" pitchFamily="49" charset="0"/>
+              </a:rPr>
+              <a:t> </a:t>
+            </a:r>
+            <a:r>
+              <a:rPr lang="en-US" b="0" i="0" dirty="0">
+                <a:solidFill>
+                  <a:srgbClr val="708090"/>
+                </a:solidFill>
+                <a:effectLst/>
+                <a:latin typeface="Consolas" panose="020B0609020204030204" pitchFamily="49" charset="0"/>
+              </a:rPr>
+              <a:t>// 30</a:t>
+            </a:r>
+            <a:endParaRPr lang="en-US" dirty="0"/>
+          </a:p>
+        </p:txBody>
+      </p:sp>
+      <p:sp>
+        <p:nvSpPr>
+          <p:cNvPr id="11" name="TextBox 10">
+            <a:extLst>
+              <a:ext uri="{FF2B5EF4-FFF2-40B4-BE49-F238E27FC236}">
+                <a16:creationId xmlns:a16="http://schemas.microsoft.com/office/drawing/2014/main" id="{0A23556E-D833-F14C-773C-5AC5626E52E9}"/>
+              </a:ext>
+            </a:extLst>
+          </p:cNvPr>
+          <p:cNvSpPr txBox="1"/>
+          <p:nvPr/>
+        </p:nvSpPr>
+        <p:spPr>
+          <a:xfrm>
+            <a:off x="150127" y="3554820"/>
+            <a:ext cx="2210936" cy="369332"/>
+          </a:xfrm>
+          <a:prstGeom prst="rect">
+            <a:avLst/>
+          </a:prstGeom>
+          <a:noFill/>
+        </p:spPr>
+        <p:txBody>
+          <a:bodyPr wrap="square">
+            <a:spAutoFit/>
+          </a:bodyPr>
+          <a:lstStyle/>
+          <a:p>
+            <a:r>
+              <a:rPr lang="en-US" b="0" i="0" dirty="0">
+                <a:solidFill>
+                  <a:srgbClr val="0077AA"/>
+                </a:solidFill>
+                <a:effectLst/>
+                <a:latin typeface="Consolas" panose="020B0609020204030204" pitchFamily="49" charset="0"/>
+              </a:rPr>
+              <a:t>delete</a:t>
+            </a:r>
+            <a:r>
+              <a:rPr lang="en-US" b="0" i="0" dirty="0">
+                <a:solidFill>
+                  <a:srgbClr val="313130"/>
+                </a:solidFill>
+                <a:effectLst/>
+                <a:latin typeface="Consolas" panose="020B0609020204030204" pitchFamily="49" charset="0"/>
+              </a:rPr>
+              <a:t> </a:t>
+            </a:r>
+            <a:r>
+              <a:rPr lang="en-US" b="0" i="0" dirty="0" err="1">
+                <a:solidFill>
+                  <a:srgbClr val="313130"/>
+                </a:solidFill>
+                <a:effectLst/>
+                <a:latin typeface="Consolas" panose="020B0609020204030204" pitchFamily="49" charset="0"/>
+              </a:rPr>
+              <a:t>user</a:t>
+            </a:r>
+            <a:r>
+              <a:rPr lang="en-US" b="0" i="0" dirty="0" err="1">
+                <a:solidFill>
+                  <a:srgbClr val="708090"/>
+                </a:solidFill>
+                <a:effectLst/>
+                <a:latin typeface="Consolas" panose="020B0609020204030204" pitchFamily="49" charset="0"/>
+              </a:rPr>
+              <a:t>.</a:t>
+            </a:r>
+            <a:r>
+              <a:rPr lang="en-US" b="0" i="0" dirty="0" err="1">
+                <a:solidFill>
+                  <a:srgbClr val="313130"/>
+                </a:solidFill>
+                <a:effectLst/>
+                <a:latin typeface="Consolas" panose="020B0609020204030204" pitchFamily="49" charset="0"/>
+              </a:rPr>
+              <a:t>age</a:t>
+            </a:r>
+            <a:r>
+              <a:rPr lang="en-US" b="0" i="0" dirty="0">
+                <a:solidFill>
+                  <a:srgbClr val="708090"/>
+                </a:solidFill>
+                <a:effectLst/>
+                <a:latin typeface="Consolas" panose="020B0609020204030204" pitchFamily="49" charset="0"/>
+              </a:rPr>
+              <a:t>;</a:t>
+            </a:r>
+            <a:endParaRPr lang="en-US" dirty="0"/>
+          </a:p>
+        </p:txBody>
+      </p:sp>
+      <p:sp>
+        <p:nvSpPr>
+          <p:cNvPr id="13" name="TextBox 12">
+            <a:extLst>
+              <a:ext uri="{FF2B5EF4-FFF2-40B4-BE49-F238E27FC236}">
+                <a16:creationId xmlns:a16="http://schemas.microsoft.com/office/drawing/2014/main" id="{92BFEC01-D87F-D495-B51D-25EF0C252E67}"/>
+              </a:ext>
+            </a:extLst>
+          </p:cNvPr>
+          <p:cNvSpPr txBox="1"/>
+          <p:nvPr/>
+        </p:nvSpPr>
+        <p:spPr>
+          <a:xfrm>
+            <a:off x="150126" y="4016485"/>
+            <a:ext cx="3425587" cy="2464777"/>
+          </a:xfrm>
+          <a:prstGeom prst="rect">
+            <a:avLst/>
+          </a:prstGeom>
+          <a:noFill/>
+        </p:spPr>
+        <p:txBody>
+          <a:bodyPr wrap="square">
+            <a:spAutoFit/>
+          </a:bodyPr>
+          <a:lstStyle/>
+          <a:p>
+            <a:pPr algn="l" rtl="0">
+              <a:lnSpc>
+                <a:spcPts val="1500"/>
+              </a:lnSpc>
+              <a:spcBef>
+                <a:spcPts val="1650"/>
+              </a:spcBef>
+              <a:spcAft>
+                <a:spcPts val="1650"/>
+              </a:spcAft>
+              <a:buNone/>
+            </a:pPr>
+            <a:r>
+              <a:rPr lang="en-US" b="0" i="0" dirty="0">
+                <a:solidFill>
+                  <a:srgbClr val="0077AA"/>
+                </a:solidFill>
+                <a:effectLst/>
+                <a:latin typeface="Consolas" panose="020B0609020204030204" pitchFamily="49" charset="0"/>
+              </a:rPr>
+              <a:t>let</a:t>
+            </a:r>
+            <a:r>
+              <a:rPr lang="en-US" b="0" i="0" dirty="0">
+                <a:solidFill>
+                  <a:srgbClr val="313130"/>
+                </a:solidFill>
+                <a:effectLst/>
+                <a:latin typeface="Consolas" panose="020B0609020204030204" pitchFamily="49" charset="0"/>
+              </a:rPr>
+              <a:t> user </a:t>
+            </a:r>
+            <a:r>
+              <a:rPr lang="en-US" b="0" i="0" dirty="0">
+                <a:solidFill>
+                  <a:srgbClr val="A67F59"/>
+                </a:solidFill>
+                <a:effectLst/>
+                <a:latin typeface="Consolas" panose="020B0609020204030204" pitchFamily="49" charset="0"/>
+              </a:rPr>
+              <a:t>=</a:t>
+            </a:r>
+            <a:r>
+              <a:rPr lang="en-US" b="0" i="0" dirty="0">
+                <a:solidFill>
+                  <a:srgbClr val="313130"/>
+                </a:solidFill>
+                <a:effectLst/>
+                <a:latin typeface="Consolas" panose="020B0609020204030204" pitchFamily="49" charset="0"/>
+              </a:rPr>
+              <a:t> </a:t>
+            </a:r>
+            <a:r>
+              <a:rPr lang="en-US" b="0" i="0" dirty="0">
+                <a:solidFill>
+                  <a:srgbClr val="708090"/>
+                </a:solidFill>
+                <a:effectLst/>
+                <a:latin typeface="Consolas" panose="020B0609020204030204" pitchFamily="49" charset="0"/>
+              </a:rPr>
+              <a:t>{</a:t>
+            </a:r>
+            <a:br>
+              <a:rPr lang="en-US" b="0" i="0" dirty="0">
+                <a:solidFill>
+                  <a:srgbClr val="313130"/>
+                </a:solidFill>
+                <a:effectLst/>
+                <a:latin typeface="Consolas" panose="020B0609020204030204" pitchFamily="49" charset="0"/>
+              </a:rPr>
+            </a:br>
+            <a:r>
+              <a:rPr lang="en-US" b="0" i="0" dirty="0">
+                <a:solidFill>
+                  <a:srgbClr val="313130"/>
+                </a:solidFill>
+                <a:effectLst/>
+                <a:latin typeface="Consolas" panose="020B0609020204030204" pitchFamily="49" charset="0"/>
+              </a:rPr>
+              <a:t>  name</a:t>
+            </a:r>
+            <a:r>
+              <a:rPr lang="en-US" b="0" i="0" dirty="0">
+                <a:solidFill>
+                  <a:srgbClr val="A67F59"/>
+                </a:solidFill>
+                <a:effectLst/>
+                <a:latin typeface="Consolas" panose="020B0609020204030204" pitchFamily="49" charset="0"/>
+              </a:rPr>
+              <a:t>:</a:t>
+            </a:r>
+            <a:r>
+              <a:rPr lang="en-US" b="0" i="0" dirty="0">
+                <a:solidFill>
+                  <a:srgbClr val="313130"/>
+                </a:solidFill>
+                <a:effectLst/>
+                <a:latin typeface="Consolas" panose="020B0609020204030204" pitchFamily="49" charset="0"/>
+              </a:rPr>
+              <a:t> </a:t>
+            </a:r>
+            <a:r>
+              <a:rPr lang="en-US" b="0" i="0" dirty="0">
+                <a:solidFill>
+                  <a:srgbClr val="669900"/>
+                </a:solidFill>
+                <a:effectLst/>
+                <a:latin typeface="Consolas" panose="020B0609020204030204" pitchFamily="49" charset="0"/>
+              </a:rPr>
+              <a:t>"John"</a:t>
+            </a:r>
+            <a:r>
+              <a:rPr lang="en-US" b="0" i="0" dirty="0">
+                <a:solidFill>
+                  <a:srgbClr val="708090"/>
+                </a:solidFill>
+                <a:effectLst/>
+                <a:latin typeface="Consolas" panose="020B0609020204030204" pitchFamily="49" charset="0"/>
+              </a:rPr>
+              <a:t>,</a:t>
+            </a:r>
+            <a:br>
+              <a:rPr lang="en-US" dirty="0">
+                <a:solidFill>
+                  <a:srgbClr val="313130"/>
+                </a:solidFill>
+                <a:latin typeface="Consolas" panose="020B0609020204030204" pitchFamily="49" charset="0"/>
+              </a:rPr>
+            </a:br>
+            <a:r>
+              <a:rPr lang="en-US" dirty="0">
+                <a:solidFill>
+                  <a:srgbClr val="313130"/>
+                </a:solidFill>
+                <a:latin typeface="Consolas" panose="020B0609020204030204" pitchFamily="49" charset="0"/>
+              </a:rPr>
+              <a:t>  </a:t>
+            </a:r>
+            <a:r>
+              <a:rPr lang="en-US" b="0" i="0" dirty="0">
+                <a:solidFill>
+                  <a:srgbClr val="313130"/>
+                </a:solidFill>
+                <a:effectLst/>
+                <a:latin typeface="Consolas" panose="020B0609020204030204" pitchFamily="49" charset="0"/>
+              </a:rPr>
+              <a:t>age</a:t>
+            </a:r>
+            <a:r>
+              <a:rPr lang="en-US" b="0" i="0" dirty="0">
+                <a:solidFill>
+                  <a:srgbClr val="A67F59"/>
+                </a:solidFill>
+                <a:effectLst/>
+                <a:latin typeface="Consolas" panose="020B0609020204030204" pitchFamily="49" charset="0"/>
+              </a:rPr>
+              <a:t>:</a:t>
+            </a:r>
+            <a:r>
+              <a:rPr lang="en-US" b="0" i="0" dirty="0">
+                <a:solidFill>
+                  <a:srgbClr val="313130"/>
+                </a:solidFill>
+                <a:effectLst/>
+                <a:latin typeface="Consolas" panose="020B0609020204030204" pitchFamily="49" charset="0"/>
+              </a:rPr>
+              <a:t> </a:t>
+            </a:r>
+            <a:r>
+              <a:rPr lang="en-US" b="0" i="0" dirty="0">
+                <a:solidFill>
+                  <a:srgbClr val="990055"/>
+                </a:solidFill>
+                <a:effectLst/>
+                <a:latin typeface="Consolas" panose="020B0609020204030204" pitchFamily="49" charset="0"/>
+              </a:rPr>
+              <a:t>30</a:t>
+            </a:r>
+            <a:r>
+              <a:rPr lang="en-US" b="0" i="0" dirty="0">
+                <a:solidFill>
+                  <a:srgbClr val="708090"/>
+                </a:solidFill>
+                <a:effectLst/>
+                <a:latin typeface="Consolas" panose="020B0609020204030204" pitchFamily="49" charset="0"/>
+              </a:rPr>
+              <a:t>,</a:t>
+            </a:r>
+            <a:br>
+              <a:rPr lang="en-US" dirty="0">
+                <a:solidFill>
+                  <a:srgbClr val="313130"/>
+                </a:solidFill>
+                <a:latin typeface="Consolas" panose="020B0609020204030204" pitchFamily="49" charset="0"/>
+              </a:rPr>
+            </a:br>
+            <a:r>
+              <a:rPr lang="en-US" b="0" i="0" dirty="0">
+                <a:solidFill>
+                  <a:srgbClr val="708090"/>
+                </a:solidFill>
+                <a:effectLst/>
+                <a:latin typeface="Consolas" panose="020B0609020204030204" pitchFamily="49" charset="0"/>
+              </a:rPr>
+              <a:t>}</a:t>
+            </a:r>
+            <a:endParaRPr lang="en-US" b="0" i="0" dirty="0">
+              <a:solidFill>
+                <a:srgbClr val="313130"/>
+              </a:solidFill>
+              <a:effectLst/>
+              <a:latin typeface="Consolas" panose="020B0609020204030204" pitchFamily="49" charset="0"/>
+            </a:endParaRPr>
+          </a:p>
+          <a:p>
+            <a:pPr algn="l">
+              <a:spcAft>
+                <a:spcPts val="900"/>
+              </a:spcAft>
+              <a:buNone/>
+            </a:pPr>
+            <a:r>
+              <a:rPr lang="en-US" b="0" i="0" dirty="0">
+                <a:solidFill>
+                  <a:srgbClr val="313130"/>
+                </a:solidFill>
+                <a:effectLst/>
+                <a:latin typeface="BlinkMacSystemFont"/>
+              </a:rPr>
+              <a:t>That is called a “trailing” or “hanging” comma. Makes it easier to add/remove/move around properties, because all lines become alike.</a:t>
+            </a:r>
+          </a:p>
+        </p:txBody>
+      </p:sp>
     </p:spTree>
     <p:extLst>
       <p:ext uri="{BB962C8B-B14F-4D97-AF65-F5344CB8AC3E}">

--- a/UmaTeachingMaterial/JavaScript/JavaScript_uma_self.pptx
+++ b/UmaTeachingMaterial/JavaScript/JavaScript_uma_self.pptx
@@ -346,7 +346,7 @@
           <a:p>
             <a:fld id="{2D1FB5FC-1629-4A0D-9573-785FAC7ED015}" type="datetimeFigureOut">
               <a:rPr lang="en-US" smtClean="0"/>
-              <a:t>3/1/2026</a:t>
+              <a:t>3/6/2026</a:t>
             </a:fld>
             <a:endParaRPr lang="en-US"/>
           </a:p>
@@ -516,7 +516,7 @@
           <a:p>
             <a:fld id="{2D1FB5FC-1629-4A0D-9573-785FAC7ED015}" type="datetimeFigureOut">
               <a:rPr lang="en-US" smtClean="0"/>
-              <a:t>3/1/2026</a:t>
+              <a:t>3/6/2026</a:t>
             </a:fld>
             <a:endParaRPr lang="en-US"/>
           </a:p>
@@ -696,7 +696,7 @@
           <a:p>
             <a:fld id="{2D1FB5FC-1629-4A0D-9573-785FAC7ED015}" type="datetimeFigureOut">
               <a:rPr lang="en-US" smtClean="0"/>
-              <a:t>3/1/2026</a:t>
+              <a:t>3/6/2026</a:t>
             </a:fld>
             <a:endParaRPr lang="en-US"/>
           </a:p>
@@ -866,7 +866,7 @@
           <a:p>
             <a:fld id="{2D1FB5FC-1629-4A0D-9573-785FAC7ED015}" type="datetimeFigureOut">
               <a:rPr lang="en-US" smtClean="0"/>
-              <a:t>3/1/2026</a:t>
+              <a:t>3/6/2026</a:t>
             </a:fld>
             <a:endParaRPr lang="en-US"/>
           </a:p>
@@ -1112,7 +1112,7 @@
           <a:p>
             <a:fld id="{2D1FB5FC-1629-4A0D-9573-785FAC7ED015}" type="datetimeFigureOut">
               <a:rPr lang="en-US" smtClean="0"/>
-              <a:t>3/1/2026</a:t>
+              <a:t>3/6/2026</a:t>
             </a:fld>
             <a:endParaRPr lang="en-US"/>
           </a:p>
@@ -1344,7 +1344,7 @@
           <a:p>
             <a:fld id="{2D1FB5FC-1629-4A0D-9573-785FAC7ED015}" type="datetimeFigureOut">
               <a:rPr lang="en-US" smtClean="0"/>
-              <a:t>3/1/2026</a:t>
+              <a:t>3/6/2026</a:t>
             </a:fld>
             <a:endParaRPr lang="en-US"/>
           </a:p>
@@ -1711,7 +1711,7 @@
           <a:p>
             <a:fld id="{2D1FB5FC-1629-4A0D-9573-785FAC7ED015}" type="datetimeFigureOut">
               <a:rPr lang="en-US" smtClean="0"/>
-              <a:t>3/1/2026</a:t>
+              <a:t>3/6/2026</a:t>
             </a:fld>
             <a:endParaRPr lang="en-US"/>
           </a:p>
@@ -1829,7 +1829,7 @@
           <a:p>
             <a:fld id="{2D1FB5FC-1629-4A0D-9573-785FAC7ED015}" type="datetimeFigureOut">
               <a:rPr lang="en-US" smtClean="0"/>
-              <a:t>3/1/2026</a:t>
+              <a:t>3/6/2026</a:t>
             </a:fld>
             <a:endParaRPr lang="en-US"/>
           </a:p>
@@ -1924,7 +1924,7 @@
           <a:p>
             <a:fld id="{2D1FB5FC-1629-4A0D-9573-785FAC7ED015}" type="datetimeFigureOut">
               <a:rPr lang="en-US" smtClean="0"/>
-              <a:t>3/1/2026</a:t>
+              <a:t>3/6/2026</a:t>
             </a:fld>
             <a:endParaRPr lang="en-US"/>
           </a:p>
@@ -2201,7 +2201,7 @@
           <a:p>
             <a:fld id="{2D1FB5FC-1629-4A0D-9573-785FAC7ED015}" type="datetimeFigureOut">
               <a:rPr lang="en-US" smtClean="0"/>
-              <a:t>3/1/2026</a:t>
+              <a:t>3/6/2026</a:t>
             </a:fld>
             <a:endParaRPr lang="en-US"/>
           </a:p>
@@ -2458,7 +2458,7 @@
           <a:p>
             <a:fld id="{2D1FB5FC-1629-4A0D-9573-785FAC7ED015}" type="datetimeFigureOut">
               <a:rPr lang="en-US" smtClean="0"/>
-              <a:t>3/1/2026</a:t>
+              <a:t>3/6/2026</a:t>
             </a:fld>
             <a:endParaRPr lang="en-US"/>
           </a:p>
@@ -2671,7 +2671,7 @@
           <a:p>
             <a:fld id="{2D1FB5FC-1629-4A0D-9573-785FAC7ED015}" type="datetimeFigureOut">
               <a:rPr lang="en-US" smtClean="0"/>
-              <a:t>3/1/2026</a:t>
+              <a:t>3/6/2026</a:t>
             </a:fld>
             <a:endParaRPr lang="en-US"/>
           </a:p>
